--- a/FlowGuard_Presentation.pptx
+++ b/FlowGuard_Presentation.pptx
@@ -3215,7 +3215,7 @@
               </a:defRPr>
             </a:pPr>
             <a:r>
-              <a:t>Presented by: Raunak Rajput | AIML Department</a:t>
+              <a:t>Presented by: Raunak Rajput, Ayush Vishwakarma, Vipul Bhamare | AIML Department</a:t>
             </a:r>
           </a:p>
         </p:txBody>
